--- a/slides/Toan10/Slide_TOAN10_CD1_Bai1_T1-5.pptx
+++ b/slides/Toan10/Slide_TOAN10_CD1_Bai1_T1-5.pptx
@@ -3801,7 +3801,7 @@
                 </a:pPr>
                 <a:r>
                   <a:rPr lang="vi-VN"/>
-                  <a:t>\begin{cases}x+y+z=240\\-y+z=80\\0{,}03x+0{,}04y+0{,}07z=13{,}4\end{cases}</a:t>
+                  <a:t>\begin{cases}x+y+z=240\\−y+z=80\\0{,}03x+0{,}04y+0{,}07z=13{,}4\end{cases}</a:t>
                 </a:r>
               </a:p>
               <a:p>
@@ -4379,7 +4379,7 @@
                 </a:pPr>
                 <a:r>
                   <a:rPr lang="vi-VN"/>
-                  <a:t>\begin{cases}x+y+z=820\\x-2y=10\\-y+z=210\end{cases}</a:t>
+                  <a:t>\begin{cases}x+y+z=820\\x−2y=10\\−y+z=210\end{cases}</a:t>
                 </a:r>
               </a:p>
             </p:txBody>
@@ -5118,7 +5118,7 @@
                 </a:pPr>
                 <a:r>
                   <a:rPr lang="vi-VN"/>
-                  <a:t>\begin{cases}-2x-3y+z=5\\2x+y+2z=-3\\-x+2y-3z=2\end{cases}</a:t>
+                  <a:t>\begin{cases}−2x−3y+z=5\\2x+y+2z=−3\\−x+2y−3z=2\end{cases}</a:t>
                 </a:r>
               </a:p>
             </p:txBody>
@@ -5215,10 +5215,18 @@
                   <m:oMath xmlns:m="http://schemas.openxmlformats.org/officeDocument/2006/math">
                     <m:d>
                       <m:dPr>
-                        <m:sepChr m:val="−"/>
+                        <m:sepChr m:val=""/>
                       </m:dPr>
-                      <m:e/>
                       <m:e>
+                        <m:r>
+                          <a:rPr lang="vi-VN" sz="2400" b="1">
+                            <a:solidFill>
+                              <a:srgbClr val="991B1B"/>
+                            </a:solidFill>
+                            <a:latin typeface="Cambria Math" panose="02040503050406030204" pitchFamily="18" charset="0"/>
+                          </a:rPr>
+                          <m:t>−</m:t>
+                        </m:r>
                         <m:r>
                           <a:rPr lang="vi-VN" sz="2400" b="1">
                             <a:solidFill>
@@ -5371,7 +5379,7 @@
                 </a:r>
                 <a:r>
                   <a:rPr lang="vi-VN"/>
-                  <a:t>\left(-4;\ \frac{11}{7};\ \frac{12}{7}\right)</a:t>
+                  <a:t>\left(−4;\ \frac{11}{7};\ \frac{12}{7}\right)</a:t>
                 </a:r>
               </a:p>
             </p:txBody>
@@ -8840,7 +8848,7 @@
                 </a:r>
                 <a:r>
                   <a:rPr lang="vi-VN"/>
-                  <a:t>\begin{cases}2x+3y-5z=13\\4x-2y-3z=3\\-x+2y+4z^2=-1\end{cases}</a:t>
+                  <a:t>\begin{cases}2x+3y−5z=13\\4x−2y−3z=3\\−x+2y+4z^2=−1\end{cases}</a:t>
                 </a:r>
                 <a:r>
                   <a:rPr sz="2400">
@@ -8853,7 +8861,7 @@
                 </a:r>
                 <a:r>
                   <a:rPr lang="vi-VN"/>
-                  <a:t>\begin{cases}-2x+y+z=-3\\5x+y-3z=16\\x+2y=5\end{cases}</a:t>
+                  <a:t>\begin{cases}−2x+y+z=−3\\5x+y−3z=16\\x+2y=5\end{cases}</a:t>
                 </a:r>
               </a:p>
             </p:txBody>
@@ -9347,7 +9355,7 @@
                 </a:pPr>
                 <a:r>
                   <a:rPr lang="vi-VN"/>
-                  <a:t>\begin{cases}x+y-2z=4\\3y+z=2\\-z=1\end{cases}</a:t>
+                  <a:t>\begin{cases}x+y−2z=4\\3y+z=2\\−z=1\end{cases}</a:t>
                 </a:r>
               </a:p>
               <a:p>
@@ -10322,7 +10330,7 @@
                 </a:pPr>
                 <a:r>
                   <a:rPr lang="vi-VN"/>
-                  <a:t>\begin{cases}x+y+z=2\\7x+3y+z=4\\-5x+7y-2z=5\end{cases}\Leftrightarrow\begin{cases}x+y+z=2\\-4y-6z=-10\\-15z=-15\end{cases}</a:t>
+                  <a:t>\begin{cases}x+y+z=2\\7x+3y+z=4\\−5x+7y−2z=5\end{cases}\Leftrightarrow\begin{cases}x+y+z=2\\−4y−6z=−10\\−15z=−15\end{cases}</a:t>
                 </a:r>
               </a:p>
               <a:p>
